--- a/evidence/2026-10-02/run-fair/raw/libreoffice/feature-matrix/measured-2.pptx
+++ b/evidence/2026-10-02/run-fair/raw/libreoffice/feature-matrix/measured-2.pptx
@@ -424,7 +424,7 @@
             <a:pPr indent="0" algn="r">
               <a:buNone/>
             </a:pPr>
-            <a:fld id="{A328D76D-8F9A-4EC0-B161-4DE184750709}" type="slidenum">
+            <a:fld id="{01C69093-31E4-44D2-9DE9-5E8AF5EB228D}" type="slidenum">
               <a:rPr lang="en-US" sz="1400" b="0" u="none" strike="noStrike">
                 <a:solidFill>
                   <a:srgbClr val="000000"/>
@@ -598,7 +598,7 @@
               </a:lnSpc>
               <a:buNone/>
             </a:pPr>
-            <a:fld id="{D9690A01-3413-4E31-88DF-A2C6B80AEFD7}" type="slidenum">
+            <a:fld id="{82783C30-5B53-4961-8641-29FFE97B2123}" type="slidenum">
               <a:rPr lang="en-US" sz="1200" b="0" u="none" strike="noStrike">
                 <a:solidFill>
                   <a:srgbClr val="000000"/>
@@ -915,7 +915,7 @@
               </a:lnSpc>
               <a:buNone/>
             </a:pPr>
-            <a:fld id="{03BFAB0E-C8EC-470B-B078-3E5918274917}" type="slidenum">
+            <a:fld id="{A5E0FCB1-3E19-4440-97AF-BED907B66D2A}" type="slidenum">
               <a:rPr lang="en-US" sz="1200" b="0" u="none" strike="noStrike">
                 <a:solidFill>
                   <a:schemeClr val="dk1">
@@ -1627,7 +1627,7 @@
               </a:lnSpc>
               <a:buNone/>
             </a:pPr>
-            <a:fld id="{7D3B1C28-41C6-4EE2-846F-697944F537AF}" type="slidenum">
+            <a:fld id="{597D5A4E-B2C4-43CA-AD04-D67E52AB49F9}" type="slidenum">
               <a:rPr lang="en-US" sz="1200" b="0" u="none" strike="noStrike">
                 <a:solidFill>
                   <a:schemeClr val="dk1">
@@ -2086,7 +2086,7 @@
               </a:lnSpc>
               <a:buNone/>
             </a:pPr>
-            <a:fld id="{D5AB0F4A-1145-4CB9-A27A-AD7A079C1B8E}" type="slidenum">
+            <a:fld id="{979BBB47-C94E-4F7C-834A-ABA8FC6E464B}" type="slidenum">
               <a:rPr lang="en-US" sz="1200" b="0" u="none" strike="noStrike">
                 <a:solidFill>
                   <a:schemeClr val="dk1">
@@ -2714,7 +2714,7 @@
               </a:lnSpc>
               <a:buNone/>
             </a:pPr>
-            <a:fld id="{A5B1679B-8F64-4B24-934C-DC1AC737A2DE}" type="slidenum">
+            <a:fld id="{1055C7F7-7D55-4C05-8FAB-6E63D4665CE1}" type="slidenum">
               <a:rPr lang="en-US" sz="1200" b="0" u="none" strike="noStrike">
                 <a:solidFill>
                   <a:schemeClr val="dk1">
@@ -3342,7 +3342,7 @@
               </a:lnSpc>
               <a:buNone/>
             </a:pPr>
-            <a:fld id="{2699C158-A8D4-4851-8EBC-36C1641F4BFF}" type="slidenum">
+            <a:fld id="{EC4235CA-8E15-48A4-A2AC-01454A883437}" type="slidenum">
               <a:rPr lang="en-US" sz="1200" b="0" u="none" strike="noStrike">
                 <a:solidFill>
                   <a:schemeClr val="dk1">
@@ -3970,7 +3970,7 @@
               </a:lnSpc>
               <a:buNone/>
             </a:pPr>
-            <a:fld id="{FC9E1576-37BC-4441-9776-E0601A90D621}" type="slidenum">
+            <a:fld id="{04606E39-CF6F-4A62-A174-43B1E2D518ED}" type="slidenum">
               <a:rPr lang="en-US" sz="1200" b="0" u="none" strike="noStrike">
                 <a:solidFill>
                   <a:schemeClr val="dk1">
@@ -4382,7 +4382,7 @@
               </a:lnSpc>
               <a:buNone/>
             </a:pPr>
-            <a:fld id="{F3345F62-40BA-4DF4-A26F-22A81FF53821}" type="slidenum">
+            <a:fld id="{773BA834-4A1E-401E-A8E5-EEBD4B9798D3}" type="slidenum">
               <a:rPr lang="en-US" sz="1200" b="0" u="none" strike="noStrike">
                 <a:solidFill>
                   <a:schemeClr val="dk1">
@@ -5316,7 +5316,7 @@
               </a:lnSpc>
               <a:buNone/>
             </a:pPr>
-            <a:fld id="{AB444D15-8668-4625-9F76-D4460D348B37}" type="slidenum">
+            <a:fld id="{4A1A1C87-2DC7-44A5-8DED-68136328CAD0}" type="slidenum">
               <a:rPr lang="en-US" sz="1200" b="0" u="none" strike="noStrike">
                 <a:solidFill>
                   <a:schemeClr val="dk1">
@@ -6478,7 +6478,7 @@
               </a:lnSpc>
               <a:buNone/>
             </a:pPr>
-            <a:fld id="{0F76ED86-0022-4AEB-AE1F-38204BCEB9CE}" type="slidenum">
+            <a:fld id="{0447F245-2517-4E0F-91B5-6E592727EFA8}" type="slidenum">
               <a:rPr lang="en-US" sz="1200" b="0" u="none" strike="noStrike">
                 <a:solidFill>
                   <a:schemeClr val="dk1">
@@ -6800,7 +6800,7 @@
               </a:lnSpc>
               <a:buNone/>
             </a:pPr>
-            <a:fld id="{B3DC8944-A6E7-428D-A658-10D82106E690}" type="slidenum">
+            <a:fld id="{2C9DADB8-BB7E-4837-8495-D7706ED28C08}" type="slidenum">
               <a:rPr lang="en-US" sz="1200" b="0" u="none" strike="noStrike">
                 <a:solidFill>
                   <a:schemeClr val="dk1">
@@ -7050,7 +7050,7 @@
               </a:lnSpc>
               <a:buNone/>
             </a:pPr>
-            <a:fld id="{9008AA5C-4F7E-4E01-8271-0058D6984A46}" type="slidenum">
+            <a:fld id="{49E630E8-09BD-443D-998B-47A2A52FE49C}" type="slidenum">
               <a:rPr lang="en-US" sz="1200" b="0" u="none" strike="noStrike">
                 <a:solidFill>
                   <a:schemeClr val="dk1">
